--- a/api/templates/brochure_en.pptx
+++ b/api/templates/brochure_en.pptx
@@ -315,7 +315,7 @@
             <a:fld id="{1D8BD707-D9CF-40AE-B4C6-C98DA3205C09}" type="datetimeFigureOut">
               <a:rPr lang="en-US" smtClean="0"/>
               <a:pPr/>
-              <a:t>2/2/2026</a:t>
+              <a:t>6/23/2026</a:t>
             </a:fld>
             <a:endParaRPr lang="en-US"/>
           </a:p>
@@ -480,7 +480,7 @@
             <a:fld id="{1D8BD707-D9CF-40AE-B4C6-C98DA3205C09}" type="datetimeFigureOut">
               <a:rPr lang="en-US" smtClean="0"/>
               <a:pPr/>
-              <a:t>2/2/2026</a:t>
+              <a:t>6/23/2026</a:t>
             </a:fld>
             <a:endParaRPr lang="en-US"/>
           </a:p>
@@ -655,7 +655,7 @@
             <a:fld id="{1D8BD707-D9CF-40AE-B4C6-C98DA3205C09}" type="datetimeFigureOut">
               <a:rPr lang="en-US" smtClean="0"/>
               <a:pPr/>
-              <a:t>2/2/2026</a:t>
+              <a:t>6/23/2026</a:t>
             </a:fld>
             <a:endParaRPr lang="en-US"/>
           </a:p>
@@ -820,7 +820,7 @@
             <a:fld id="{1D8BD707-D9CF-40AE-B4C6-C98DA3205C09}" type="datetimeFigureOut">
               <a:rPr lang="en-US" smtClean="0"/>
               <a:pPr/>
-              <a:t>2/2/2026</a:t>
+              <a:t>6/23/2026</a:t>
             </a:fld>
             <a:endParaRPr lang="en-US"/>
           </a:p>
@@ -1062,7 +1062,7 @@
             <a:fld id="{1D8BD707-D9CF-40AE-B4C6-C98DA3205C09}" type="datetimeFigureOut">
               <a:rPr lang="en-US" smtClean="0"/>
               <a:pPr/>
-              <a:t>2/2/2026</a:t>
+              <a:t>6/23/2026</a:t>
             </a:fld>
             <a:endParaRPr lang="en-US"/>
           </a:p>
@@ -1344,7 +1344,7 @@
             <a:fld id="{1D8BD707-D9CF-40AE-B4C6-C98DA3205C09}" type="datetimeFigureOut">
               <a:rPr lang="en-US" smtClean="0"/>
               <a:pPr/>
-              <a:t>2/2/2026</a:t>
+              <a:t>6/23/2026</a:t>
             </a:fld>
             <a:endParaRPr lang="en-US"/>
           </a:p>
@@ -1760,7 +1760,7 @@
             <a:fld id="{1D8BD707-D9CF-40AE-B4C6-C98DA3205C09}" type="datetimeFigureOut">
               <a:rPr lang="en-US" smtClean="0"/>
               <a:pPr/>
-              <a:t>2/2/2026</a:t>
+              <a:t>6/23/2026</a:t>
             </a:fld>
             <a:endParaRPr lang="en-US"/>
           </a:p>
@@ -1874,7 +1874,7 @@
             <a:fld id="{1D8BD707-D9CF-40AE-B4C6-C98DA3205C09}" type="datetimeFigureOut">
               <a:rPr lang="en-US" smtClean="0"/>
               <a:pPr/>
-              <a:t>2/2/2026</a:t>
+              <a:t>6/23/2026</a:t>
             </a:fld>
             <a:endParaRPr lang="en-US"/>
           </a:p>
@@ -1966,7 +1966,7 @@
             <a:fld id="{1D8BD707-D9CF-40AE-B4C6-C98DA3205C09}" type="datetimeFigureOut">
               <a:rPr lang="en-US" smtClean="0"/>
               <a:pPr/>
-              <a:t>2/2/2026</a:t>
+              <a:t>6/23/2026</a:t>
             </a:fld>
             <a:endParaRPr lang="en-US"/>
           </a:p>
@@ -2238,7 +2238,7 @@
             <a:fld id="{1D8BD707-D9CF-40AE-B4C6-C98DA3205C09}" type="datetimeFigureOut">
               <a:rPr lang="en-US" smtClean="0"/>
               <a:pPr/>
-              <a:t>2/2/2026</a:t>
+              <a:t>6/23/2026</a:t>
             </a:fld>
             <a:endParaRPr lang="en-US"/>
           </a:p>
@@ -2487,7 +2487,7 @@
             <a:fld id="{1D8BD707-D9CF-40AE-B4C6-C98DA3205C09}" type="datetimeFigureOut">
               <a:rPr lang="en-US" smtClean="0"/>
               <a:pPr/>
-              <a:t>2/2/2026</a:t>
+              <a:t>6/23/2026</a:t>
             </a:fld>
             <a:endParaRPr lang="en-US"/>
           </a:p>
@@ -2695,7 +2695,7 @@
             <a:fld id="{1D8BD707-D9CF-40AE-B4C6-C98DA3205C09}" type="datetimeFigureOut">
               <a:rPr lang="en-US" smtClean="0"/>
               <a:pPr/>
-              <a:t>2/2/2026</a:t>
+              <a:t>6/23/2026</a:t>
             </a:fld>
             <a:endParaRPr lang="en-US"/>
           </a:p>
@@ -3655,7 +3655,7 @@
             <p:spPr>
               <a:xfrm>
                 <a:off x="442913" y="1226277"/>
-                <a:ext cx="3628993" cy="890416"/>
+                <a:ext cx="3628993" cy="445849"/>
               </a:xfrm>
               <a:prstGeom prst="rect">
                 <a:avLst/>
@@ -3701,7 +3701,7 @@
                     <a:cs typeface="Circe"/>
                     <a:sym typeface="Circe"/>
                   </a:rPr>
-                  <a:t>Book excursions at reception and receive a 10% discount voucher for a City Sightseeing tour.</a:t>
+                  <a:t>Book excursions at reception.</a:t>
                 </a:r>
               </a:p>
             </p:txBody>
@@ -4143,9 +4143,9 @@
             <p:nvPr/>
           </p:nvSpPr>
           <p:spPr>
-            <a:xfrm flipV="1">
-              <a:off x="954473" y="4091357"/>
-              <a:ext cx="1417186" cy="12316"/>
+            <a:xfrm>
+              <a:off x="954473" y="4103673"/>
+              <a:ext cx="1417186" cy="6420"/>
             </a:xfrm>
             <a:prstGeom prst="line">
               <a:avLst/>
@@ -4326,7 +4326,7 @@
                   <a:cs typeface="Circe"/>
                   <a:sym typeface="Circe"/>
                 </a:rPr>
-                <a:t>Continental breakfast is served from 9:30 AM to 11:30 AM, starting from 850 RUB. Lunch and dinner are also available à la carte.</a:t>
+                <a:t>Continental breakfast is served from 9:30 AM to 11:30 AM, starting from 950 RUB. Lunch and dinner are also available à la carte.</a:t>
               </a:r>
             </a:p>
           </p:txBody>
